--- a/第1章-空间数据简介/选做作业1.pptx
+++ b/第1章-空间数据简介/选做作业1.pptx
@@ -1636,6 +1636,30 @@
     </pc:docChg>
   </pc:docChgLst>
   <pc:docChgLst>
+    <pc:chgData name="Xin Luo" userId="82312ee5779919a4" providerId="LiveId" clId="{DA3CAFA3-5513-6141-A5FE-EEEF42866040}"/>
+    <pc:docChg chg="modSld">
+      <pc:chgData name="Xin Luo" userId="82312ee5779919a4" providerId="LiveId" clId="{DA3CAFA3-5513-6141-A5FE-EEEF42866040}" dt="2025-02-25T01:22:35.983" v="43" actId="1035"/>
+      <pc:docMkLst>
+        <pc:docMk/>
+      </pc:docMkLst>
+      <pc:sldChg chg="modSp mod">
+        <pc:chgData name="Xin Luo" userId="82312ee5779919a4" providerId="LiveId" clId="{DA3CAFA3-5513-6141-A5FE-EEEF42866040}" dt="2025-02-25T01:22:35.983" v="43" actId="1035"/>
+        <pc:sldMkLst>
+          <pc:docMk/>
+          <pc:sldMk cId="1602808061" sldId="2707"/>
+        </pc:sldMkLst>
+        <pc:spChg chg="mod">
+          <ac:chgData name="Xin Luo" userId="82312ee5779919a4" providerId="LiveId" clId="{DA3CAFA3-5513-6141-A5FE-EEEF42866040}" dt="2025-02-25T01:22:35.983" v="43" actId="1035"/>
+          <ac:spMkLst>
+            <pc:docMk/>
+            <pc:sldMk cId="1602808061" sldId="2707"/>
+            <ac:spMk id="2" creationId="{631AADB6-C88A-D817-4683-FC087E4E240F}"/>
+          </ac:spMkLst>
+        </pc:spChg>
+      </pc:sldChg>
+    </pc:docChg>
+  </pc:docChgLst>
+  <pc:docChgLst>
     <pc:chgData name="Xin Luo" userId="82312ee5779919a4" providerId="LiveId" clId="{4DB6C473-8E57-A543-81F7-48BE109E8C13}"/>
     <pc:docChg chg="undo custSel addSld delSld modSld sldOrd delMainMaster">
       <pc:chgData name="Xin Luo" userId="82312ee5779919a4" providerId="LiveId" clId="{4DB6C473-8E57-A543-81F7-48BE109E8C13}" dt="2023-02-21T15:10:04.498" v="5724" actId="108"/>
@@ -1984,30 +2008,6 @@
     </pc:docChg>
   </pc:docChgLst>
   <pc:docChgLst>
-    <pc:chgData name="Xin Luo" userId="82312ee5779919a4" providerId="LiveId" clId="{DA3CAFA3-5513-6141-A5FE-EEEF42866040}"/>
-    <pc:docChg chg="modSld">
-      <pc:chgData name="Xin Luo" userId="82312ee5779919a4" providerId="LiveId" clId="{DA3CAFA3-5513-6141-A5FE-EEEF42866040}" dt="2025-02-25T01:22:35.983" v="43" actId="1035"/>
-      <pc:docMkLst>
-        <pc:docMk/>
-      </pc:docMkLst>
-      <pc:sldChg chg="modSp mod">
-        <pc:chgData name="Xin Luo" userId="82312ee5779919a4" providerId="LiveId" clId="{DA3CAFA3-5513-6141-A5FE-EEEF42866040}" dt="2025-02-25T01:22:35.983" v="43" actId="1035"/>
-        <pc:sldMkLst>
-          <pc:docMk/>
-          <pc:sldMk cId="1602808061" sldId="2707"/>
-        </pc:sldMkLst>
-        <pc:spChg chg="mod">
-          <ac:chgData name="Xin Luo" userId="82312ee5779919a4" providerId="LiveId" clId="{DA3CAFA3-5513-6141-A5FE-EEEF42866040}" dt="2025-02-25T01:22:35.983" v="43" actId="1035"/>
-          <ac:spMkLst>
-            <pc:docMk/>
-            <pc:sldMk cId="1602808061" sldId="2707"/>
-            <ac:spMk id="2" creationId="{631AADB6-C88A-D817-4683-FC087E4E240F}"/>
-          </ac:spMkLst>
-        </pc:spChg>
-      </pc:sldChg>
-    </pc:docChg>
-  </pc:docChgLst>
-  <pc:docChgLst>
     <pc:chgData name="Xin Luo" userId="82312ee5779919a4" providerId="LiveId" clId="{F0FBE88A-F528-A34D-8F82-6AAA647597C3}"/>
     <pc:docChg chg="undo custSel addSld delSld modSld sldOrd">
       <pc:chgData name="Xin Luo" userId="82312ee5779919a4" providerId="LiveId" clId="{F0FBE88A-F528-A34D-8F82-6AAA647597C3}" dt="2024-04-13T15:36:19.917" v="5171" actId="20577"/>
@@ -3039,7 +3039,7 @@
               </a14:hiddenFill>
             </a:ext>
             <a:ext uri="{FAA26D3D-D897-4be2-8F04-BA451C77F1D7}">
-              <ma14:placeholderFlag xmlns="" xmlns:ma14="http://schemas.microsoft.com/office/mac/drawingml/2011/main" val="1"/>
+              <ma14:placeholderFlag xmlns:ma14="http://schemas.microsoft.com/office/mac/drawingml/2011/main" xmlns="" val="1"/>
             </a:ext>
           </a:extLst>
         </p:spPr>
@@ -5258,7 +5258,7 @@
               </a14:hiddenLine>
             </a:ext>
             <a:ext uri="{FAA26D3D-D897-4be2-8F04-BA451C77F1D7}">
-              <ma14:placeholderFlag xmlns="" xmlns:ma14="http://schemas.microsoft.com/office/mac/drawingml/2011/main" val="1"/>
+              <ma14:placeholderFlag xmlns:ma14="http://schemas.microsoft.com/office/mac/drawingml/2011/main" xmlns="" val="1"/>
             </a:ext>
           </a:extLst>
         </p:spPr>
@@ -8954,7 +8954,7 @@
               </a14:hiddenLine>
             </a:ext>
             <a:ext uri="{FAA26D3D-D897-4be2-8F04-BA451C77F1D7}">
-              <ma14:placeholderFlag xmlns="" xmlns:ma14="http://schemas.microsoft.com/office/mac/drawingml/2011/main" val="1"/>
+              <ma14:placeholderFlag xmlns:ma14="http://schemas.microsoft.com/office/mac/drawingml/2011/main" xmlns="" val="1"/>
             </a:ext>
           </a:extLst>
         </p:spPr>
@@ -10429,8 +10429,8 @@
         </p:nvSpPr>
         <p:spPr>
           <a:xfrm>
-            <a:off x="450850" y="876530"/>
-            <a:ext cx="11091693" cy="743986"/>
+            <a:off x="450851" y="876530"/>
+            <a:ext cx="5891708" cy="743986"/>
           </a:xfrm>
           <a:prstGeom prst="rect">
             <a:avLst/>
@@ -10514,7 +10514,7 @@
                 <a:latin typeface="+mn-ea"/>
                 <a:ea typeface="+mn-ea"/>
               </a:rPr>
-              <a:t>2016/2026</a:t>
+              <a:t>2015/2025</a:t>
             </a:r>
             <a:r>
               <a:rPr lang="zh-CN" altLang="en-US" sz="2800" b="1" u="sng" dirty="0">
@@ -10687,14 +10687,24 @@
               <a:t>）</a:t>
             </a:r>
             <a:r>
-              <a:rPr lang="en-US" altLang="zh-CN" sz="2300" dirty="0">
+              <a:rPr lang="en-US" altLang="zh-CN" sz="2300">
                 <a:solidFill>
                   <a:srgbClr val="333333"/>
                 </a:solidFill>
                 <a:latin typeface="+mn-ea"/>
                 <a:ea typeface="+mn-ea"/>
               </a:rPr>
-              <a:t>2016-2026</a:t>
+              <a:t>2015-2025</a:t>
+            </a:r>
+            <a:r>
+              <a:rPr lang="zh-CN" altLang="en-US" sz="2300">
+                <a:solidFill>
+                  <a:srgbClr val="333333"/>
+                </a:solidFill>
+                <a:latin typeface="+mn-ea"/>
+                <a:ea typeface="+mn-ea"/>
+              </a:rPr>
+              <a:t>云南</a:t>
             </a:r>
             <a:r>
               <a:rPr lang="zh-CN" altLang="en-US" sz="2300" dirty="0">
@@ -10704,7 +10714,7 @@
                 <a:latin typeface="+mn-ea"/>
                 <a:ea typeface="+mn-ea"/>
               </a:rPr>
-              <a:t>云南大学建筑物变化分析。</a:t>
+              <a:t>大学建筑物变化分析。</a:t>
             </a:r>
             <a:endParaRPr lang="en-US" altLang="zh-CN" sz="2300" dirty="0">
               <a:solidFill>
@@ -10924,7 +10934,7 @@
                 <a:latin typeface="+mn-ea"/>
                 <a:ea typeface="+mn-ea"/>
               </a:rPr>
-              <a:t>3</a:t>
+              <a:t>4</a:t>
             </a:r>
             <a:r>
               <a:rPr lang="zh-CN" altLang="en-US" sz="2300" b="1" u="sng" dirty="0">
@@ -10944,7 +10954,7 @@
                 <a:latin typeface="+mn-ea"/>
                 <a:ea typeface="+mn-ea"/>
               </a:rPr>
-              <a:t>31</a:t>
+              <a:t>15</a:t>
             </a:r>
             <a:r>
               <a:rPr lang="zh-CN" altLang="en-US" sz="2300" b="1" u="sng" dirty="0">
